--- a/[디자인 원본] 호흡_시스템_기획문서.pptx
+++ b/[디자인 원본] 호흡_시스템_기획문서.pptx
@@ -341,7 +341,7 @@
           <a:p>
             <a:fld id="{5BCAD085-E8A6-8845-BD4E-CB4CCA059FC4}" type="datetimeFigureOut">
               <a:rPr lang="en-US" smtClean="0"/>
-              <a:t>8/18/2026</a:t>
+              <a:t>8/19/2026</a:t>
             </a:fld>
             <a:endParaRPr lang="en-US"/>
           </a:p>
@@ -509,7 +509,7 @@
           <a:p>
             <a:fld id="{5BCAD085-E8A6-8845-BD4E-CB4CCA059FC4}" type="datetimeFigureOut">
               <a:rPr lang="en-US" smtClean="0"/>
-              <a:t>8/18/2026</a:t>
+              <a:t>8/19/2026</a:t>
             </a:fld>
             <a:endParaRPr lang="en-US"/>
           </a:p>
@@ -687,7 +687,7 @@
           <a:p>
             <a:fld id="{5BCAD085-E8A6-8845-BD4E-CB4CCA059FC4}" type="datetimeFigureOut">
               <a:rPr lang="en-US" smtClean="0"/>
-              <a:t>8/18/2026</a:t>
+              <a:t>8/19/2026</a:t>
             </a:fld>
             <a:endParaRPr lang="en-US"/>
           </a:p>
@@ -855,7 +855,7 @@
           <a:p>
             <a:fld id="{5BCAD085-E8A6-8845-BD4E-CB4CCA059FC4}" type="datetimeFigureOut">
               <a:rPr lang="en-US" smtClean="0"/>
-              <a:t>8/18/2026</a:t>
+              <a:t>8/19/2026</a:t>
             </a:fld>
             <a:endParaRPr lang="en-US"/>
           </a:p>
@@ -1100,7 +1100,7 @@
           <a:p>
             <a:fld id="{5BCAD085-E8A6-8845-BD4E-CB4CCA059FC4}" type="datetimeFigureOut">
               <a:rPr lang="en-US" smtClean="0"/>
-              <a:t>8/18/2026</a:t>
+              <a:t>8/19/2026</a:t>
             </a:fld>
             <a:endParaRPr lang="en-US"/>
           </a:p>
@@ -1385,7 +1385,7 @@
           <a:p>
             <a:fld id="{5BCAD085-E8A6-8845-BD4E-CB4CCA059FC4}" type="datetimeFigureOut">
               <a:rPr lang="en-US" smtClean="0"/>
-              <a:t>8/18/2026</a:t>
+              <a:t>8/19/2026</a:t>
             </a:fld>
             <a:endParaRPr lang="en-US"/>
           </a:p>
@@ -1804,7 +1804,7 @@
           <a:p>
             <a:fld id="{5BCAD085-E8A6-8845-BD4E-CB4CCA059FC4}" type="datetimeFigureOut">
               <a:rPr lang="en-US" smtClean="0"/>
-              <a:t>8/18/2026</a:t>
+              <a:t>8/19/2026</a:t>
             </a:fld>
             <a:endParaRPr lang="en-US"/>
           </a:p>
@@ -1921,7 +1921,7 @@
           <a:p>
             <a:fld id="{5BCAD085-E8A6-8845-BD4E-CB4CCA059FC4}" type="datetimeFigureOut">
               <a:rPr lang="en-US" smtClean="0"/>
-              <a:t>8/18/2026</a:t>
+              <a:t>8/19/2026</a:t>
             </a:fld>
             <a:endParaRPr lang="en-US"/>
           </a:p>
@@ -2016,7 +2016,7 @@
           <a:p>
             <a:fld id="{5BCAD085-E8A6-8845-BD4E-CB4CCA059FC4}" type="datetimeFigureOut">
               <a:rPr lang="en-US" smtClean="0"/>
-              <a:t>8/18/2026</a:t>
+              <a:t>8/19/2026</a:t>
             </a:fld>
             <a:endParaRPr lang="en-US"/>
           </a:p>
@@ -2291,7 +2291,7 @@
           <a:p>
             <a:fld id="{5BCAD085-E8A6-8845-BD4E-CB4CCA059FC4}" type="datetimeFigureOut">
               <a:rPr lang="en-US" smtClean="0"/>
-              <a:t>8/18/2026</a:t>
+              <a:t>8/19/2026</a:t>
             </a:fld>
             <a:endParaRPr lang="en-US"/>
           </a:p>
@@ -2543,7 +2543,7 @@
           <a:p>
             <a:fld id="{5BCAD085-E8A6-8845-BD4E-CB4CCA059FC4}" type="datetimeFigureOut">
               <a:rPr lang="en-US" smtClean="0"/>
-              <a:t>8/18/2026</a:t>
+              <a:t>8/19/2026</a:t>
             </a:fld>
             <a:endParaRPr lang="en-US"/>
           </a:p>
@@ -2754,7 +2754,7 @@
           <a:p>
             <a:fld id="{5BCAD085-E8A6-8845-BD4E-CB4CCA059FC4}" type="datetimeFigureOut">
               <a:rPr lang="en-US" smtClean="0"/>
-              <a:t>8/18/2026</a:t>
+              <a:t>8/19/2026</a:t>
             </a:fld>
             <a:endParaRPr lang="en-US"/>
           </a:p>
